--- a/vault/blogs/claude-security-beta-devsecops/slides.pptx
+++ b/vault/blogs/claude-security-beta-devsecops/slides.pptx
@@ -3984,7 +3984,7 @@
                   <a:srgbClr val="FFFFFF"/>
                 </a:solidFill>
               </a:rPr>
-              <a:t>  See the deeper analysis in [[2026-05-01-claude-security-beta]].</a:t>
+              <a:t>  See the companion deep-dive on Claude Security Beta (published 2026-05-01).</a:t>
             </a:r>
           </a:p>
         </p:txBody>
